--- a/files/teaching-resources/concordiacollege-busn-315/busn-315-lecture-note/busn315-ch09.pptx
+++ b/files/teaching-resources/concordiacollege-busn-315/busn-315-lecture-note/busn315-ch09.pptx
@@ -253,7 +253,7 @@
           <a:p>
             <a:fld id="{2D359EC7-19C7-4638-A61A-0E2B59861576}" type="datetimeFigureOut">
               <a:rPr lang="en-US" smtClean="0"/>
-              <a:t>3/23/2026</a:t>
+              <a:t>4/14/2026</a:t>
             </a:fld>
             <a:endParaRPr lang="en-US"/>
           </a:p>
@@ -5679,7 +5679,7 @@
           <a:p>
             <a:fld id="{DFCAFFB9-A874-4FD1-A824-B4042D61D1ED}" type="datetime1">
               <a:rPr lang="en-US" smtClean="0"/>
-              <a:t>3/23/2026</a:t>
+              <a:t>4/14/2026</a:t>
             </a:fld>
             <a:endParaRPr lang="en-US"/>
           </a:p>
@@ -5850,7 +5850,7 @@
           <a:p>
             <a:fld id="{D290497A-627B-46A8-B138-876D4281251E}" type="datetime1">
               <a:rPr lang="en-US" smtClean="0"/>
-              <a:t>3/23/2026</a:t>
+              <a:t>4/14/2026</a:t>
             </a:fld>
             <a:endParaRPr lang="en-US"/>
           </a:p>
@@ -6031,7 +6031,7 @@
           <a:p>
             <a:fld id="{81749246-640D-41B6-A07B-C0FA43D7FEE2}" type="datetime1">
               <a:rPr lang="en-US" smtClean="0"/>
-              <a:t>3/23/2026</a:t>
+              <a:t>4/14/2026</a:t>
             </a:fld>
             <a:endParaRPr lang="en-US"/>
           </a:p>
@@ -6202,7 +6202,7 @@
           <a:p>
             <a:fld id="{2EF79C1E-59CB-458D-A8DF-3DF069B9691A}" type="datetime1">
               <a:rPr lang="en-US" smtClean="0"/>
-              <a:t>3/23/2026</a:t>
+              <a:t>4/14/2026</a:t>
             </a:fld>
             <a:endParaRPr lang="en-US"/>
           </a:p>
@@ -6450,7 +6450,7 @@
           <a:p>
             <a:fld id="{40B038F5-1F4F-49BC-AE81-A69593E39F17}" type="datetime1">
               <a:rPr lang="en-US" smtClean="0"/>
-              <a:t>3/23/2026</a:t>
+              <a:t>4/14/2026</a:t>
             </a:fld>
             <a:endParaRPr lang="en-US"/>
           </a:p>
@@ -6738,7 +6738,7 @@
           <a:p>
             <a:fld id="{3F2B9C03-4953-4667-8B38-5F82E8B7824A}" type="datetime1">
               <a:rPr lang="en-US" smtClean="0"/>
-              <a:t>3/23/2026</a:t>
+              <a:t>4/14/2026</a:t>
             </a:fld>
             <a:endParaRPr lang="en-US"/>
           </a:p>
@@ -7160,7 +7160,7 @@
           <a:p>
             <a:fld id="{CCFF53C9-7EE5-4279-90C5-33FD7C6945F2}" type="datetime1">
               <a:rPr lang="en-US" smtClean="0"/>
-              <a:t>3/23/2026</a:t>
+              <a:t>4/14/2026</a:t>
             </a:fld>
             <a:endParaRPr lang="en-US"/>
           </a:p>
@@ -7280,7 +7280,7 @@
           <a:p>
             <a:fld id="{604720FA-FDEE-4E83-A4C7-BC2FB4952465}" type="datetime1">
               <a:rPr lang="en-US" smtClean="0"/>
-              <a:t>3/23/2026</a:t>
+              <a:t>4/14/2026</a:t>
             </a:fld>
             <a:endParaRPr lang="en-US"/>
           </a:p>
@@ -7378,7 +7378,7 @@
           <a:p>
             <a:fld id="{F4851516-679C-4D73-B89D-29E30821AF23}" type="datetime1">
               <a:rPr lang="en-US" smtClean="0"/>
-              <a:t>3/23/2026</a:t>
+              <a:t>4/14/2026</a:t>
             </a:fld>
             <a:endParaRPr lang="en-US"/>
           </a:p>
@@ -7656,7 +7656,7 @@
           <a:p>
             <a:fld id="{6B003A1F-F54C-4527-A898-553BBCF40EAB}" type="datetime1">
               <a:rPr lang="en-US" smtClean="0"/>
-              <a:t>3/23/2026</a:t>
+              <a:t>4/14/2026</a:t>
             </a:fld>
             <a:endParaRPr lang="en-US"/>
           </a:p>
@@ -7911,7 +7911,7 @@
           <a:p>
             <a:fld id="{12FD13F6-D87E-4E9E-B027-94AE4C3308CD}" type="datetime1">
               <a:rPr lang="en-US" smtClean="0"/>
-              <a:t>3/23/2026</a:t>
+              <a:t>4/14/2026</a:t>
             </a:fld>
             <a:endParaRPr lang="en-US"/>
           </a:p>
@@ -8125,7 +8125,7 @@
           <a:p>
             <a:fld id="{5BE17758-26A5-42DB-960B-17BBCDA98EFC}" type="datetime1">
               <a:rPr lang="en-US" smtClean="0"/>
-              <a:t>3/23/2026</a:t>
+              <a:t>4/14/2026</a:t>
             </a:fld>
             <a:endParaRPr lang="en-US"/>
           </a:p>
@@ -13723,7 +13723,7 @@
                                         <p:tgtEl>
                                           <p:spTgt spid="3">
                                             <p:txEl>
-                                              <p:pRg st="2" end="2"/>
+                                              <p:pRg st="0" end="0"/>
                                             </p:txEl>
                                           </p:spTgt>
                                         </p:tgtEl>
@@ -13741,7 +13741,7 @@
                                         <p:tgtEl>
                                           <p:spTgt spid="3">
                                             <p:txEl>
-                                              <p:pRg st="2" end="2"/>
+                                              <p:pRg st="0" end="0"/>
                                             </p:txEl>
                                           </p:spTgt>
                                         </p:tgtEl>
@@ -13784,7 +13784,7 @@
                                         <p:tgtEl>
                                           <p:spTgt spid="3">
                                             <p:txEl>
-                                              <p:pRg st="0" end="0"/>
+                                              <p:pRg st="2" end="2"/>
                                             </p:txEl>
                                           </p:spTgt>
                                         </p:tgtEl>
@@ -13802,7 +13802,7 @@
                                         <p:tgtEl>
                                           <p:spTgt spid="3">
                                             <p:txEl>
-                                              <p:pRg st="0" end="0"/>
+                                              <p:pRg st="2" end="2"/>
                                             </p:txEl>
                                           </p:spTgt>
                                         </p:tgtEl>
@@ -21073,6 +21073,41 @@
                                   </p:childTnLst>
                                 </p:cTn>
                               </p:par>
+                              <p:par>
+                                <p:cTn id="8" presetID="10" presetClass="entr" presetSubtype="0" fill="hold" nodeType="withEffect">
+                                  <p:stCondLst>
+                                    <p:cond delay="0"/>
+                                  </p:stCondLst>
+                                  <p:childTnLst>
+                                    <p:set>
+                                      <p:cBhvr>
+                                        <p:cTn id="9" dur="1" fill="hold">
+                                          <p:stCondLst>
+                                            <p:cond delay="0"/>
+                                          </p:stCondLst>
+                                        </p:cTn>
+                                        <p:tgtEl>
+                                          <p:spTgt spid="9"/>
+                                        </p:tgtEl>
+                                        <p:attrNameLst>
+                                          <p:attrName>style.visibility</p:attrName>
+                                        </p:attrNameLst>
+                                      </p:cBhvr>
+                                      <p:to>
+                                        <p:strVal val="visible"/>
+                                      </p:to>
+                                    </p:set>
+                                    <p:animEffect transition="in" filter="fade">
+                                      <p:cBhvr>
+                                        <p:cTn id="10" dur="500"/>
+                                        <p:tgtEl>
+                                          <p:spTgt spid="9"/>
+                                        </p:tgtEl>
+                                      </p:cBhvr>
+                                    </p:animEffect>
+                                  </p:childTnLst>
+                                </p:cTn>
+                              </p:par>
                             </p:childTnLst>
                           </p:cTn>
                         </p:par>
@@ -21080,26 +21115,26 @@
                     </p:cTn>
                   </p:par>
                   <p:par>
-                    <p:cTn id="8" fill="hold">
+                    <p:cTn id="11" fill="hold">
                       <p:stCondLst>
                         <p:cond delay="indefinite"/>
                       </p:stCondLst>
                       <p:childTnLst>
                         <p:par>
-                          <p:cTn id="9" fill="hold">
+                          <p:cTn id="12" fill="hold">
                             <p:stCondLst>
                               <p:cond delay="0"/>
                             </p:stCondLst>
                             <p:childTnLst>
                               <p:par>
-                                <p:cTn id="10" presetID="10" presetClass="entr" presetSubtype="0" fill="hold" nodeType="clickEffect">
+                                <p:cTn id="13" presetID="10" presetClass="entr" presetSubtype="0" fill="hold" nodeType="clickEffect">
                                   <p:stCondLst>
                                     <p:cond delay="0"/>
                                   </p:stCondLst>
                                   <p:childTnLst>
                                     <p:set>
                                       <p:cBhvr>
-                                        <p:cTn id="11" dur="1" fill="hold">
+                                        <p:cTn id="14" dur="1" fill="hold">
                                           <p:stCondLst>
                                             <p:cond delay="0"/>
                                           </p:stCondLst>
@@ -21121,54 +21156,11 @@
                                     </p:set>
                                     <p:animEffect transition="in" filter="fade">
                                       <p:cBhvr>
-                                        <p:cTn id="12" dur="500"/>
+                                        <p:cTn id="15" dur="500"/>
                                         <p:tgtEl>
                                           <p:spTgt spid="3">
                                             <p:txEl>
                                               <p:pRg st="2" end="2"/>
-                                            </p:txEl>
-                                          </p:spTgt>
-                                        </p:tgtEl>
-                                      </p:cBhvr>
-                                    </p:animEffect>
-                                  </p:childTnLst>
-                                </p:cTn>
-                              </p:par>
-                              <p:par>
-                                <p:cTn id="13" presetID="10" presetClass="entr" presetSubtype="0" fill="hold" nodeType="withEffect">
-                                  <p:stCondLst>
-                                    <p:cond delay="0"/>
-                                  </p:stCondLst>
-                                  <p:childTnLst>
-                                    <p:set>
-                                      <p:cBhvr>
-                                        <p:cTn id="14" dur="1" fill="hold">
-                                          <p:stCondLst>
-                                            <p:cond delay="0"/>
-                                          </p:stCondLst>
-                                        </p:cTn>
-                                        <p:tgtEl>
-                                          <p:spTgt spid="3">
-                                            <p:txEl>
-                                              <p:pRg st="3" end="3"/>
-                                            </p:txEl>
-                                          </p:spTgt>
-                                        </p:tgtEl>
-                                        <p:attrNameLst>
-                                          <p:attrName>style.visibility</p:attrName>
-                                        </p:attrNameLst>
-                                      </p:cBhvr>
-                                      <p:to>
-                                        <p:strVal val="visible"/>
-                                      </p:to>
-                                    </p:set>
-                                    <p:animEffect transition="in" filter="fade">
-                                      <p:cBhvr>
-                                        <p:cTn id="15" dur="500"/>
-                                        <p:tgtEl>
-                                          <p:spTgt spid="3">
-                                            <p:txEl>
-                                              <p:pRg st="3" end="3"/>
                                             </p:txEl>
                                           </p:spTgt>
                                         </p:tgtEl>
@@ -21193,7 +21185,7 @@
                                         <p:tgtEl>
                                           <p:spTgt spid="3">
                                             <p:txEl>
-                                              <p:pRg st="4" end="4"/>
+                                              <p:pRg st="3" end="3"/>
                                             </p:txEl>
                                           </p:spTgt>
                                         </p:tgtEl>
@@ -21208,6 +21200,49 @@
                                     <p:animEffect transition="in" filter="fade">
                                       <p:cBhvr>
                                         <p:cTn id="18" dur="500"/>
+                                        <p:tgtEl>
+                                          <p:spTgt spid="3">
+                                            <p:txEl>
+                                              <p:pRg st="3" end="3"/>
+                                            </p:txEl>
+                                          </p:spTgt>
+                                        </p:tgtEl>
+                                      </p:cBhvr>
+                                    </p:animEffect>
+                                  </p:childTnLst>
+                                </p:cTn>
+                              </p:par>
+                              <p:par>
+                                <p:cTn id="19" presetID="10" presetClass="entr" presetSubtype="0" fill="hold" nodeType="withEffect">
+                                  <p:stCondLst>
+                                    <p:cond delay="0"/>
+                                  </p:stCondLst>
+                                  <p:childTnLst>
+                                    <p:set>
+                                      <p:cBhvr>
+                                        <p:cTn id="20" dur="1" fill="hold">
+                                          <p:stCondLst>
+                                            <p:cond delay="0"/>
+                                          </p:stCondLst>
+                                        </p:cTn>
+                                        <p:tgtEl>
+                                          <p:spTgt spid="3">
+                                            <p:txEl>
+                                              <p:pRg st="4" end="4"/>
+                                            </p:txEl>
+                                          </p:spTgt>
+                                        </p:tgtEl>
+                                        <p:attrNameLst>
+                                          <p:attrName>style.visibility</p:attrName>
+                                        </p:attrNameLst>
+                                      </p:cBhvr>
+                                      <p:to>
+                                        <p:strVal val="visible"/>
+                                      </p:to>
+                                    </p:set>
+                                    <p:animEffect transition="in" filter="fade">
+                                      <p:cBhvr>
+                                        <p:cTn id="21" dur="500"/>
                                         <p:tgtEl>
                                           <p:spTgt spid="3">
                                             <p:txEl>
@@ -21227,26 +21262,26 @@
                     </p:cTn>
                   </p:par>
                   <p:par>
-                    <p:cTn id="19" fill="hold">
+                    <p:cTn id="22" fill="hold">
                       <p:stCondLst>
                         <p:cond delay="indefinite"/>
                       </p:stCondLst>
                       <p:childTnLst>
                         <p:par>
-                          <p:cTn id="20" fill="hold">
+                          <p:cTn id="23" fill="hold">
                             <p:stCondLst>
                               <p:cond delay="0"/>
                             </p:stCondLst>
                             <p:childTnLst>
                               <p:par>
-                                <p:cTn id="21" presetID="10" presetClass="entr" presetSubtype="0" fill="hold" nodeType="clickEffect">
+                                <p:cTn id="24" presetID="10" presetClass="entr" presetSubtype="0" fill="hold" nodeType="clickEffect">
                                   <p:stCondLst>
                                     <p:cond delay="0"/>
                                   </p:stCondLst>
                                   <p:childTnLst>
                                     <p:set>
                                       <p:cBhvr>
-                                        <p:cTn id="22" dur="1" fill="hold">
+                                        <p:cTn id="25" dur="1" fill="hold">
                                           <p:stCondLst>
                                             <p:cond delay="0"/>
                                           </p:stCondLst>
@@ -21268,48 +21303,13 @@
                                     </p:set>
                                     <p:animEffect transition="in" filter="fade">
                                       <p:cBhvr>
-                                        <p:cTn id="23" dur="500"/>
+                                        <p:cTn id="26" dur="500"/>
                                         <p:tgtEl>
                                           <p:spTgt spid="3">
                                             <p:txEl>
                                               <p:pRg st="6" end="6"/>
                                             </p:txEl>
                                           </p:spTgt>
-                                        </p:tgtEl>
-                                      </p:cBhvr>
-                                    </p:animEffect>
-                                  </p:childTnLst>
-                                </p:cTn>
-                              </p:par>
-                              <p:par>
-                                <p:cTn id="24" presetID="10" presetClass="entr" presetSubtype="0" fill="hold" nodeType="withEffect">
-                                  <p:stCondLst>
-                                    <p:cond delay="0"/>
-                                  </p:stCondLst>
-                                  <p:childTnLst>
-                                    <p:set>
-                                      <p:cBhvr>
-                                        <p:cTn id="25" dur="1" fill="hold">
-                                          <p:stCondLst>
-                                            <p:cond delay="0"/>
-                                          </p:stCondLst>
-                                        </p:cTn>
-                                        <p:tgtEl>
-                                          <p:spTgt spid="9"/>
-                                        </p:tgtEl>
-                                        <p:attrNameLst>
-                                          <p:attrName>style.visibility</p:attrName>
-                                        </p:attrNameLst>
-                                      </p:cBhvr>
-                                      <p:to>
-                                        <p:strVal val="visible"/>
-                                      </p:to>
-                                    </p:set>
-                                    <p:animEffect transition="in" filter="fade">
-                                      <p:cBhvr>
-                                        <p:cTn id="26" dur="500"/>
-                                        <p:tgtEl>
-                                          <p:spTgt spid="9"/>
                                         </p:tgtEl>
                                       </p:cBhvr>
                                     </p:animEffect>
@@ -34153,7 +34153,7 @@
                   <a:schemeClr val="bg1"/>
                 </a:solidFill>
               </a:rPr>
-              <a:t>Challenges to Enterprise Application</a:t>
+              <a:t>Challenges to Enterprise Applications</a:t>
             </a:r>
             <a:endParaRPr sz="4400" dirty="0">
               <a:solidFill>
@@ -37569,15 +37569,33 @@
                                   </p:childTnLst>
                                 </p:cTn>
                               </p:par>
+                            </p:childTnLst>
+                          </p:cTn>
+                        </p:par>
+                      </p:childTnLst>
+                    </p:cTn>
+                  </p:par>
+                  <p:par>
+                    <p:cTn id="41" fill="hold">
+                      <p:stCondLst>
+                        <p:cond delay="indefinite"/>
+                      </p:stCondLst>
+                      <p:childTnLst>
+                        <p:par>
+                          <p:cTn id="42" fill="hold">
+                            <p:stCondLst>
+                              <p:cond delay="0"/>
+                            </p:stCondLst>
+                            <p:childTnLst>
                               <p:par>
-                                <p:cTn id="41" presetID="10" presetClass="entr" presetSubtype="0" fill="hold" nodeType="withEffect">
+                                <p:cTn id="43" presetID="10" presetClass="entr" presetSubtype="0" fill="hold" nodeType="clickEffect">
                                   <p:stCondLst>
                                     <p:cond delay="0"/>
                                   </p:stCondLst>
                                   <p:childTnLst>
                                     <p:set>
                                       <p:cBhvr>
-                                        <p:cTn id="42" dur="1" fill="hold">
+                                        <p:cTn id="44" dur="1" fill="hold">
                                           <p:stCondLst>
                                             <p:cond delay="0"/>
                                           </p:stCondLst>
@@ -37599,7 +37617,7 @@
                                     </p:set>
                                     <p:animEffect transition="in" filter="fade">
                                       <p:cBhvr>
-                                        <p:cTn id="43" dur="500"/>
+                                        <p:cTn id="45" dur="500"/>
                                         <p:tgtEl>
                                           <p:spTgt spid="9">
                                             <p:txEl>
@@ -37613,14 +37631,14 @@
                                 </p:cTn>
                               </p:par>
                               <p:par>
-                                <p:cTn id="44" presetID="10" presetClass="entr" presetSubtype="0" fill="hold" nodeType="withEffect">
+                                <p:cTn id="46" presetID="10" presetClass="entr" presetSubtype="0" fill="hold" nodeType="withEffect">
                                   <p:stCondLst>
                                     <p:cond delay="0"/>
                                   </p:stCondLst>
                                   <p:childTnLst>
                                     <p:set>
                                       <p:cBhvr>
-                                        <p:cTn id="45" dur="1" fill="hold">
+                                        <p:cTn id="47" dur="1" fill="hold">
                                           <p:stCondLst>
                                             <p:cond delay="0"/>
                                           </p:stCondLst>
@@ -37642,7 +37660,7 @@
                                     </p:set>
                                     <p:animEffect transition="in" filter="fade">
                                       <p:cBhvr>
-                                        <p:cTn id="46" dur="500"/>
+                                        <p:cTn id="48" dur="500"/>
                                         <p:tgtEl>
                                           <p:spTgt spid="9">
                                             <p:txEl>
@@ -37656,14 +37674,14 @@
                                 </p:cTn>
                               </p:par>
                               <p:par>
-                                <p:cTn id="47" presetID="10" presetClass="entr" presetSubtype="0" fill="hold" nodeType="withEffect">
+                                <p:cTn id="49" presetID="10" presetClass="entr" presetSubtype="0" fill="hold" nodeType="withEffect">
                                   <p:stCondLst>
                                     <p:cond delay="0"/>
                                   </p:stCondLst>
                                   <p:childTnLst>
                                     <p:set>
                                       <p:cBhvr>
-                                        <p:cTn id="48" dur="1" fill="hold">
+                                        <p:cTn id="50" dur="1" fill="hold">
                                           <p:stCondLst>
                                             <p:cond delay="0"/>
                                           </p:stCondLst>
@@ -37685,7 +37703,7 @@
                                     </p:set>
                                     <p:animEffect transition="in" filter="fade">
                                       <p:cBhvr>
-                                        <p:cTn id="49" dur="500"/>
+                                        <p:cTn id="51" dur="500"/>
                                         <p:tgtEl>
                                           <p:spTgt spid="9">
                                             <p:txEl>
@@ -37705,26 +37723,26 @@
                     </p:cTn>
                   </p:par>
                   <p:par>
-                    <p:cTn id="50" fill="hold">
+                    <p:cTn id="52" fill="hold">
                       <p:stCondLst>
                         <p:cond delay="indefinite"/>
                       </p:stCondLst>
                       <p:childTnLst>
                         <p:par>
-                          <p:cTn id="51" fill="hold">
+                          <p:cTn id="53" fill="hold">
                             <p:stCondLst>
                               <p:cond delay="0"/>
                             </p:stCondLst>
                             <p:childTnLst>
                               <p:par>
-                                <p:cTn id="52" presetID="10" presetClass="entr" presetSubtype="0" fill="hold" nodeType="clickEffect">
+                                <p:cTn id="54" presetID="10" presetClass="entr" presetSubtype="0" fill="hold" nodeType="clickEffect">
                                   <p:stCondLst>
                                     <p:cond delay="0"/>
                                   </p:stCondLst>
                                   <p:childTnLst>
                                     <p:set>
                                       <p:cBhvr>
-                                        <p:cTn id="53" dur="1" fill="hold">
+                                        <p:cTn id="55" dur="1" fill="hold">
                                           <p:stCondLst>
                                             <p:cond delay="0"/>
                                           </p:stCondLst>
@@ -37746,7 +37764,7 @@
                                     </p:set>
                                     <p:animEffect transition="in" filter="fade">
                                       <p:cBhvr>
-                                        <p:cTn id="54" dur="500"/>
+                                        <p:cTn id="56" dur="500"/>
                                         <p:tgtEl>
                                           <p:spTgt spid="9">
                                             <p:txEl>
@@ -37760,14 +37778,14 @@
                                 </p:cTn>
                               </p:par>
                               <p:par>
-                                <p:cTn id="55" presetID="10" presetClass="entr" presetSubtype="0" fill="hold" nodeType="withEffect">
+                                <p:cTn id="57" presetID="10" presetClass="entr" presetSubtype="0" fill="hold" nodeType="withEffect">
                                   <p:stCondLst>
                                     <p:cond delay="0"/>
                                   </p:stCondLst>
                                   <p:childTnLst>
                                     <p:set>
                                       <p:cBhvr>
-                                        <p:cTn id="56" dur="1" fill="hold">
+                                        <p:cTn id="58" dur="1" fill="hold">
                                           <p:stCondLst>
                                             <p:cond delay="0"/>
                                           </p:stCondLst>
@@ -37789,7 +37807,7 @@
                                     </p:set>
                                     <p:animEffect transition="in" filter="fade">
                                       <p:cBhvr>
-                                        <p:cTn id="57" dur="500"/>
+                                        <p:cTn id="59" dur="500"/>
                                         <p:tgtEl>
                                           <p:spTgt spid="9">
                                             <p:txEl>
@@ -37803,14 +37821,14 @@
                                 </p:cTn>
                               </p:par>
                               <p:par>
-                                <p:cTn id="58" presetID="10" presetClass="entr" presetSubtype="0" fill="hold" nodeType="withEffect">
+                                <p:cTn id="60" presetID="10" presetClass="entr" presetSubtype="0" fill="hold" nodeType="withEffect">
                                   <p:stCondLst>
                                     <p:cond delay="0"/>
                                   </p:stCondLst>
                                   <p:childTnLst>
                                     <p:set>
                                       <p:cBhvr>
-                                        <p:cTn id="59" dur="1" fill="hold">
+                                        <p:cTn id="61" dur="1" fill="hold">
                                           <p:stCondLst>
                                             <p:cond delay="0"/>
                                           </p:stCondLst>
@@ -37832,7 +37850,7 @@
                                     </p:set>
                                     <p:animEffect transition="in" filter="fade">
                                       <p:cBhvr>
-                                        <p:cTn id="60" dur="500"/>
+                                        <p:cTn id="62" dur="500"/>
                                         <p:tgtEl>
                                           <p:spTgt spid="9">
                                             <p:txEl>
